--- a/Week10/week10 Drill with TensorFlow 2.x.pptx
+++ b/Week10/week10 Drill with TensorFlow 2.x.pptx
@@ -264,7 +264,7 @@
           <a:p>
             <a:fld id="{D9D2A4DD-E6C5-4446-8814-DDCEAB64F4E0}" type="datetimeFigureOut">
               <a:rPr lang="ko-KR" altLang="en-US" smtClean="0"/>
-              <a:t>2023-05-08</a:t>
+              <a:t>2025-05-15</a:t>
             </a:fld>
             <a:endParaRPr lang="ko-KR" altLang="en-US"/>
           </a:p>
@@ -429,7 +429,7 @@
           <a:p>
             <a:fld id="{BF4D36B7-6BC9-4358-A9C9-63F4AFA82B46}" type="datetimeFigureOut">
               <a:rPr lang="ko-KR" altLang="en-US" smtClean="0"/>
-              <a:t>2023-05-08</a:t>
+              <a:t>2025-05-15</a:t>
             </a:fld>
             <a:endParaRPr lang="ko-KR" altLang="en-US"/>
           </a:p>
@@ -4271,7 +4271,7 @@
           <a:p>
             <a:fld id="{178ADFAC-D890-497A-A497-2A400DD02E74}" type="datetimeFigureOut">
               <a:rPr lang="ko-KR" altLang="en-US" smtClean="0"/>
-              <a:t>2023-05-08</a:t>
+              <a:t>2025-05-15</a:t>
             </a:fld>
             <a:endParaRPr lang="ko-KR" altLang="en-US"/>
           </a:p>
@@ -4441,7 +4441,7 @@
           <a:p>
             <a:fld id="{178ADFAC-D890-497A-A497-2A400DD02E74}" type="datetimeFigureOut">
               <a:rPr lang="ko-KR" altLang="en-US" smtClean="0"/>
-              <a:t>2023-05-08</a:t>
+              <a:t>2025-05-15</a:t>
             </a:fld>
             <a:endParaRPr lang="ko-KR" altLang="en-US"/>
           </a:p>
@@ -4621,7 +4621,7 @@
           <a:p>
             <a:fld id="{178ADFAC-D890-497A-A497-2A400DD02E74}" type="datetimeFigureOut">
               <a:rPr lang="ko-KR" altLang="en-US" smtClean="0"/>
-              <a:t>2023-05-08</a:t>
+              <a:t>2025-05-15</a:t>
             </a:fld>
             <a:endParaRPr lang="ko-KR" altLang="en-US"/>
           </a:p>
@@ -4791,7 +4791,7 @@
           <a:p>
             <a:fld id="{178ADFAC-D890-497A-A497-2A400DD02E74}" type="datetimeFigureOut">
               <a:rPr lang="ko-KR" altLang="en-US" smtClean="0"/>
-              <a:t>2023-05-08</a:t>
+              <a:t>2025-05-15</a:t>
             </a:fld>
             <a:endParaRPr lang="ko-KR" altLang="en-US"/>
           </a:p>
@@ -5035,7 +5035,7 @@
           <a:p>
             <a:fld id="{178ADFAC-D890-497A-A497-2A400DD02E74}" type="datetimeFigureOut">
               <a:rPr lang="ko-KR" altLang="en-US" smtClean="0"/>
-              <a:t>2023-05-08</a:t>
+              <a:t>2025-05-15</a:t>
             </a:fld>
             <a:endParaRPr lang="ko-KR" altLang="en-US"/>
           </a:p>
@@ -5267,7 +5267,7 @@
           <a:p>
             <a:fld id="{178ADFAC-D890-497A-A497-2A400DD02E74}" type="datetimeFigureOut">
               <a:rPr lang="ko-KR" altLang="en-US" smtClean="0"/>
-              <a:t>2023-05-08</a:t>
+              <a:t>2025-05-15</a:t>
             </a:fld>
             <a:endParaRPr lang="ko-KR" altLang="en-US"/>
           </a:p>
@@ -5634,7 +5634,7 @@
           <a:p>
             <a:fld id="{178ADFAC-D890-497A-A497-2A400DD02E74}" type="datetimeFigureOut">
               <a:rPr lang="ko-KR" altLang="en-US" smtClean="0"/>
-              <a:t>2023-05-08</a:t>
+              <a:t>2025-05-15</a:t>
             </a:fld>
             <a:endParaRPr lang="ko-KR" altLang="en-US"/>
           </a:p>
@@ -5752,7 +5752,7 @@
           <a:p>
             <a:fld id="{178ADFAC-D890-497A-A497-2A400DD02E74}" type="datetimeFigureOut">
               <a:rPr lang="ko-KR" altLang="en-US" smtClean="0"/>
-              <a:t>2023-05-08</a:t>
+              <a:t>2025-05-15</a:t>
             </a:fld>
             <a:endParaRPr lang="ko-KR" altLang="en-US"/>
           </a:p>
@@ -5847,7 +5847,7 @@
           <a:p>
             <a:fld id="{178ADFAC-D890-497A-A497-2A400DD02E74}" type="datetimeFigureOut">
               <a:rPr lang="ko-KR" altLang="en-US" smtClean="0"/>
-              <a:t>2023-05-08</a:t>
+              <a:t>2025-05-15</a:t>
             </a:fld>
             <a:endParaRPr lang="ko-KR" altLang="en-US"/>
           </a:p>
@@ -6124,7 +6124,7 @@
           <a:p>
             <a:fld id="{178ADFAC-D890-497A-A497-2A400DD02E74}" type="datetimeFigureOut">
               <a:rPr lang="ko-KR" altLang="en-US" smtClean="0"/>
-              <a:t>2023-05-08</a:t>
+              <a:t>2025-05-15</a:t>
             </a:fld>
             <a:endParaRPr lang="ko-KR" altLang="en-US"/>
           </a:p>
@@ -6381,7 +6381,7 @@
           <a:p>
             <a:fld id="{178ADFAC-D890-497A-A497-2A400DD02E74}" type="datetimeFigureOut">
               <a:rPr lang="ko-KR" altLang="en-US" smtClean="0"/>
-              <a:t>2023-05-08</a:t>
+              <a:t>2025-05-15</a:t>
             </a:fld>
             <a:endParaRPr lang="ko-KR" altLang="en-US"/>
           </a:p>
@@ -6594,7 +6594,7 @@
           <a:p>
             <a:fld id="{178ADFAC-D890-497A-A497-2A400DD02E74}" type="datetimeFigureOut">
               <a:rPr lang="ko-KR" altLang="en-US" smtClean="0"/>
-              <a:t>2023-05-08</a:t>
+              <a:t>2025-05-15</a:t>
             </a:fld>
             <a:endParaRPr lang="ko-KR" altLang="en-US"/>
           </a:p>
@@ -7118,7 +7118,7 @@
         <p:spPr>
           <a:xfrm>
             <a:off x="1075166" y="3978237"/>
-            <a:ext cx="6941127" cy="1384995"/>
+            <a:ext cx="6941127" cy="1314334"/>
           </a:xfrm>
           <a:prstGeom prst="rect">
             <a:avLst/>
@@ -7168,7 +7168,7 @@
                 <a:latin typeface="Arial Narrow" panose="020B0606020202030204" pitchFamily="34" charset="0"/>
                 <a:cs typeface="Times New Roman" panose="02020603050405020304" pitchFamily="18" charset="0"/>
               </a:rPr>
-              <a:t>Assistant professor </a:t>
+              <a:t>Associate professor </a:t>
             </a:r>
           </a:p>
         </p:txBody>
